--- a/project_docs/FamilyPulse_Presentation.pptx
+++ b/project_docs/FamilyPulse_Presentation.pptx
@@ -22,9 +22,10 @@
     <p:sldId id="270" r:id="rId16"/>
     <p:sldId id="271" r:id="rId17"/>
     <p:sldId id="272" r:id="rId18"/>
+    <p:sldId id="273" r:id="rId19"/>
   </p:sldIdLst>
   <p:notesMasterIdLst>
-    <p:notesMasterId r:id="rId19"/>
+    <p:notesMasterId r:id="rId20"/>
   </p:notesMasterIdLst>
   <p:sldSz cx="12192000" cy="6858000"/>
   <p:notesSz cx="6858000" cy="12192000"/>
@@ -1475,7 +1476,7 @@
           <a:p>
             <a:r>
               <a:rPr lang="en-US" dirty="0"/>
-              <a:t>Close by inviting questions. Good places examiners may probe: the security-rules design (Slide 4), the two root-caused bugs (Slide 14), or the FlutterFlow team situation (Slide 15) — all three are backed by detail in the written report and tracker if a deeper answer is needed.</a:t>
+              <a:t>Keep this grounded, not hypey: the free tier is everything already shipped, so nobody loses functionality — Family Plus only gates the storage-heavy and calendar-sync features real competitors already charge for. The $19,500 figure is a napkin-math illustration of the model, not a forecast; say so out loud if asked. If examiners push on numbers, the honest answer is that validating real conversion rate would need a pilot — the point of this slide is that the pricing model itself is not speculative, since two direct competitors already run it profitably.</a:t>
             </a:r>
             <a:endParaRPr lang="en-US" dirty="0"/>
           </a:p>
@@ -1499,6 +1500,94 @@
             <a:fld id="{F7021451-1387-4CA6-816F-3879F97B5CBC}" type="slidenum">
               <a:rPr lang="en-US"/>
               <a:t>17</a:t>
+            </a:fld>
+            <a:endParaRPr lang="en-US"/>
+          </a:p>
+        </p:txBody>
+      </p:sp>
+    </p:spTree>
+    <p:extLst>
+      <p:ext uri="{BB962C8B-B14F-4D97-AF65-F5344CB8AC3E}">
+        <p14:creationId xmlns:p14="http://schemas.microsoft.com/office/powerpoint/2010/main" val="1024086991"/>
+      </p:ext>
+    </p:extLst>
+  </p:cSld>
+  <p:clrMapOvr>
+    <a:masterClrMapping/>
+  </p:clrMapOvr>
+</p:notes>
+</file>
+
+<file path=ppt/notesSlides/notesSlide18.xml><?xml version="1.0" encoding="utf-8"?>
+<p:notes xmlns:a="http://schemas.openxmlformats.org/drawingml/2006/main" xmlns:r="http://schemas.openxmlformats.org/officeDocument/2006/relationships" xmlns:p="http://schemas.openxmlformats.org/presentationml/2006/main">
+  <p:cSld>
+    <p:spTree>
+      <p:nvGrpSpPr>
+        <p:cNvPr id="1" name=""/>
+        <p:cNvGrpSpPr/>
+        <p:nvPr/>
+      </p:nvGrpSpPr>
+      <p:grpSpPr>
+        <a:xfrm>
+          <a:off x="0" y="0"/>
+          <a:ext cx="0" cy="0"/>
+          <a:chOff x="0" y="0"/>
+          <a:chExt cx="0" cy="0"/>
+        </a:xfrm>
+      </p:grpSpPr>
+      <p:sp>
+        <p:nvSpPr>
+          <p:cNvPr id="2" name="Slide Image Placeholder 1"/>
+          <p:cNvSpPr>
+            <a:spLocks noGrp="1" noRot="1" noChangeAspect="1"/>
+          </p:cNvSpPr>
+          <p:nvPr>
+            <p:ph type="sldImg"/>
+          </p:nvPr>
+        </p:nvSpPr>
+        <p:spPr/>
+      </p:sp>
+      <p:sp>
+        <p:nvSpPr>
+          <p:cNvPr id="3" name="Notes Placeholder 2"/>
+          <p:cNvSpPr>
+            <a:spLocks noGrp="1"/>
+          </p:cNvSpPr>
+          <p:nvPr>
+            <p:ph type="body" idx="1"/>
+          </p:nvPr>
+        </p:nvSpPr>
+        <p:spPr/>
+        <p:txBody>
+          <a:bodyPr/>
+          <a:lstStyle/>
+          <a:p>
+            <a:r>
+              <a:rPr lang="en-US" dirty="0"/>
+              <a:t>Close by inviting questions. Good places examiners may probe: the security-rules design (Slide 4), the two root-caused bugs (Slide 14), or the FlutterFlow team situation (Slide 15) — all three are backed by detail in the written report and tracker if a deeper answer is needed.</a:t>
+            </a:r>
+            <a:endParaRPr lang="en-US" dirty="0"/>
+          </a:p>
+        </p:txBody>
+      </p:sp>
+      <p:sp>
+        <p:nvSpPr>
+          <p:cNvPr id="4" name="Slide Number Placeholder 3"/>
+          <p:cNvSpPr>
+            <a:spLocks noGrp="1"/>
+          </p:cNvSpPr>
+          <p:nvPr>
+            <p:ph type="sldNum" sz="quarter" idx="10"/>
+          </p:nvPr>
+        </p:nvSpPr>
+        <p:spPr/>
+        <p:txBody>
+          <a:bodyPr/>
+          <a:lstStyle/>
+          <a:p>
+            <a:fld id="{F7021451-1387-4CA6-816F-3879F97B5CBC}" type="slidenum">
+              <a:rPr lang="en-US"/>
+              <a:t>18</a:t>
             </a:fld>
             <a:endParaRPr lang="en-US"/>
           </a:p>
@@ -7506,6 +7595,873 @@
           <a:chExt cx="0" cy="0"/>
         </a:xfrm>
       </p:grpSpPr>
+      <p:sp>
+        <p:nvSpPr>
+          <p:cNvPr id="2" name="Shape 0"/>
+          <p:cNvSpPr/>
+          <p:nvPr/>
+        </p:nvSpPr>
+        <p:spPr>
+          <a:xfrm>
+            <a:off x="548640" y="640080"/>
+            <a:ext cx="566928" cy="566928"/>
+          </a:xfrm>
+          <a:prstGeom prst="ellipse">
+            <a:avLst/>
+          </a:prstGeom>
+          <a:solidFill>
+            <a:srgbClr val="E8654D"/>
+          </a:solidFill>
+          <a:ln/>
+        </p:spPr>
+      </p:sp>
+      <p:pic>
+        <p:nvPicPr>
+          <p:cNvPr id="3" name="Image 0" descr="/home/claude/family_pulse_docs/deck/icons/chart_FFFFFF.png">    </p:cNvPr>
+          <p:cNvPicPr>
+            <a:picLocks noChangeAspect="1"/>
+          </p:cNvPicPr>
+          <p:nvPr/>
+        </p:nvPicPr>
+        <p:blipFill>
+          <a:blip r:embed="rId1"/>
+          <a:stretch>
+            <a:fillRect/>
+          </a:stretch>
+        </p:blipFill>
+        <p:spPr>
+          <a:xfrm>
+            <a:off x="622341" y="713781"/>
+            <a:ext cx="419527" cy="419527"/>
+          </a:xfrm>
+          <a:prstGeom prst="rect">
+            <a:avLst/>
+          </a:prstGeom>
+        </p:spPr>
+      </p:pic>
+      <p:sp>
+        <p:nvSpPr>
+          <p:cNvPr id="4" name="Text 1"/>
+          <p:cNvSpPr txBox="1"/>
+          <p:nvPr/>
+        </p:nvSpPr>
+        <p:spPr>
+          <a:xfrm>
+            <a:off x="1298448" y="658368"/>
+            <a:ext cx="7315200" cy="320040"/>
+          </a:xfrm>
+          <a:prstGeom prst="rect">
+            <a:avLst/>
+          </a:prstGeom>
+          <a:noFill/>
+          <a:ln/>
+        </p:spPr>
+        <p:txBody>
+          <a:bodyPr wrap="square" lIns="0" tIns="0" rIns="0" bIns="0" rtlCol="0" anchor="ctr"/>
+          <a:lstStyle/>
+          <a:p>
+            <a:pPr indent="0" marL="0">
+              <a:buNone/>
+            </a:pPr>
+            <a:r>
+              <a:rPr lang="en-US" sz="1200" b="1" spc="200" kern="0" dirty="0">
+                <a:solidFill>
+                  <a:srgbClr val="E8654D"/>
+                </a:solidFill>
+                <a:latin typeface="Calibri" pitchFamily="34" charset="0"/>
+                <a:ea typeface="Calibri" pitchFamily="34" charset="-122"/>
+                <a:cs typeface="Calibri" pitchFamily="34" charset="-120"/>
+              </a:rPr>
+              <a:t>BUSINESS POTENTIAL</a:t>
+            </a:r>
+            <a:endParaRPr lang="en-US" sz="1200" dirty="0"/>
+          </a:p>
+        </p:txBody>
+      </p:sp>
+      <p:sp>
+        <p:nvSpPr>
+          <p:cNvPr id="5" name="Text 2"/>
+          <p:cNvSpPr txBox="1"/>
+          <p:nvPr/>
+        </p:nvSpPr>
+        <p:spPr>
+          <a:xfrm>
+            <a:off x="1280160" y="868680"/>
+            <a:ext cx="10332720" cy="640080"/>
+          </a:xfrm>
+          <a:prstGeom prst="rect">
+            <a:avLst/>
+          </a:prstGeom>
+          <a:noFill/>
+          <a:ln/>
+        </p:spPr>
+        <p:txBody>
+          <a:bodyPr wrap="square" lIns="0" tIns="0" rIns="0" bIns="0" rtlCol="0" anchor="ctr"/>
+          <a:lstStyle/>
+          <a:p>
+            <a:pPr indent="0" marL="0">
+              <a:buNone/>
+            </a:pPr>
+            <a:r>
+              <a:rPr lang="en-US" sz="3000" b="1" dirty="0">
+                <a:solidFill>
+                  <a:srgbClr val="1E2A4A"/>
+                </a:solidFill>
+                <a:latin typeface="Cambria" pitchFamily="34" charset="0"/>
+                <a:ea typeface="Cambria" pitchFamily="34" charset="-122"/>
+                <a:cs typeface="Cambria" pitchFamily="34" charset="-120"/>
+              </a:rPr>
+              <a:t>A freemium model already proven in this exact market</a:t>
+            </a:r>
+            <a:endParaRPr lang="en-US" sz="3000" dirty="0"/>
+          </a:p>
+        </p:txBody>
+      </p:sp>
+      <p:sp>
+        <p:nvSpPr>
+          <p:cNvPr id="6" name="Shape 3"/>
+          <p:cNvSpPr/>
+          <p:nvPr/>
+        </p:nvSpPr>
+        <p:spPr>
+          <a:xfrm>
+            <a:off x="548640" y="1828800"/>
+            <a:ext cx="3502152" cy="457200"/>
+          </a:xfrm>
+          <a:prstGeom prst="roundRect">
+            <a:avLst>
+              <a:gd name="adj" fmla="val 16000"/>
+            </a:avLst>
+          </a:prstGeom>
+          <a:solidFill>
+            <a:srgbClr val="5B6478"/>
+          </a:solidFill>
+          <a:ln/>
+        </p:spPr>
+      </p:sp>
+      <p:sp>
+        <p:nvSpPr>
+          <p:cNvPr id="7" name="Text 4"/>
+          <p:cNvSpPr txBox="1"/>
+          <p:nvPr/>
+        </p:nvSpPr>
+        <p:spPr>
+          <a:xfrm>
+            <a:off x="548640" y="1828800"/>
+            <a:ext cx="3502152" cy="457200"/>
+          </a:xfrm>
+          <a:prstGeom prst="rect">
+            <a:avLst/>
+          </a:prstGeom>
+          <a:noFill/>
+          <a:ln/>
+        </p:spPr>
+        <p:txBody>
+          <a:bodyPr wrap="square" lIns="0" tIns="0" rIns="0" bIns="0" rtlCol="0" anchor="ctr"/>
+          <a:lstStyle/>
+          <a:p>
+            <a:pPr algn="ctr" indent="0" marL="0">
+              <a:buNone/>
+            </a:pPr>
+            <a:r>
+              <a:rPr lang="en-US" sz="1250" b="1" dirty="0">
+                <a:solidFill>
+                  <a:srgbClr val="FFFFFF"/>
+                </a:solidFill>
+                <a:latin typeface="Calibri" pitchFamily="34" charset="0"/>
+                <a:ea typeface="Calibri" pitchFamily="34" charset="-122"/>
+                <a:cs typeface="Calibri" pitchFamily="34" charset="-120"/>
+              </a:rPr>
+              <a:t>Free</a:t>
+            </a:r>
+            <a:endParaRPr lang="en-US" sz="1250" dirty="0"/>
+          </a:p>
+        </p:txBody>
+      </p:sp>
+      <p:sp>
+        <p:nvSpPr>
+          <p:cNvPr id="8" name="Shape 5"/>
+          <p:cNvSpPr/>
+          <p:nvPr/>
+        </p:nvSpPr>
+        <p:spPr>
+          <a:xfrm>
+            <a:off x="548640" y="2450592"/>
+            <a:ext cx="3502152" cy="1417320"/>
+          </a:xfrm>
+          <a:prstGeom prst="roundRect">
+            <a:avLst>
+              <a:gd name="adj" fmla="val 5161"/>
+            </a:avLst>
+          </a:prstGeom>
+          <a:solidFill>
+            <a:srgbClr val="F7F7F9"/>
+          </a:solidFill>
+          <a:ln w="12700">
+            <a:solidFill>
+              <a:srgbClr val="E4E4EA"/>
+            </a:solidFill>
+            <a:prstDash val="solid"/>
+          </a:ln>
+        </p:spPr>
+      </p:sp>
+      <p:sp>
+        <p:nvSpPr>
+          <p:cNvPr id="9" name="Text 6"/>
+          <p:cNvSpPr txBox="1"/>
+          <p:nvPr/>
+        </p:nvSpPr>
+        <p:spPr>
+          <a:xfrm>
+            <a:off x="713232" y="2560320"/>
+            <a:ext cx="3172968" cy="365760"/>
+          </a:xfrm>
+          <a:prstGeom prst="rect">
+            <a:avLst/>
+          </a:prstGeom>
+          <a:noFill/>
+          <a:ln/>
+        </p:spPr>
+        <p:txBody>
+          <a:bodyPr wrap="square" lIns="0" tIns="0" rIns="0" bIns="0" rtlCol="0" anchor="ctr"/>
+          <a:lstStyle/>
+          <a:p>
+            <a:pPr indent="0" marL="0">
+              <a:buNone/>
+            </a:pPr>
+            <a:r>
+              <a:rPr lang="en-US" sz="1250" b="1" dirty="0">
+                <a:solidFill>
+                  <a:srgbClr val="1E2A4A"/>
+                </a:solidFill>
+                <a:latin typeface="Calibri" pitchFamily="34" charset="0"/>
+                <a:ea typeface="Calibri" pitchFamily="34" charset="-122"/>
+                <a:cs typeface="Calibri" pitchFamily="34" charset="-120"/>
+              </a:rPr>
+              <a:t>Everything built this term</a:t>
+            </a:r>
+            <a:endParaRPr lang="en-US" sz="1250" dirty="0"/>
+          </a:p>
+        </p:txBody>
+      </p:sp>
+      <p:sp>
+        <p:nvSpPr>
+          <p:cNvPr id="10" name="Text 7"/>
+          <p:cNvSpPr txBox="1"/>
+          <p:nvPr/>
+        </p:nvSpPr>
+        <p:spPr>
+          <a:xfrm>
+            <a:off x="713232" y="2907792"/>
+            <a:ext cx="3172968" cy="914400"/>
+          </a:xfrm>
+          <a:prstGeom prst="rect">
+            <a:avLst/>
+          </a:prstGeom>
+          <a:noFill/>
+          <a:ln/>
+        </p:spPr>
+        <p:txBody>
+          <a:bodyPr wrap="square" lIns="0" tIns="0" rIns="0" bIns="0" rtlCol="0" anchor="ctr"/>
+          <a:lstStyle/>
+          <a:p>
+            <a:pPr indent="0" marL="0">
+              <a:buNone/>
+            </a:pPr>
+            <a:r>
+              <a:rPr lang="en-US" sz="1050" dirty="0">
+                <a:solidFill>
+                  <a:srgbClr val="5B6478"/>
+                </a:solidFill>
+                <a:latin typeface="Calibri" pitchFamily="34" charset="0"/>
+                <a:ea typeface="Calibri" pitchFamily="34" charset="-122"/>
+                <a:cs typeface="Calibri" pitchFamily="34" charset="-120"/>
+              </a:rPr>
+              <a:t>Shared calendar, family groups, free-time finder, analytics, and full profiles — the whole feature set stays free for any one family.</a:t>
+            </a:r>
+            <a:endParaRPr lang="en-US" sz="1050" dirty="0"/>
+          </a:p>
+        </p:txBody>
+      </p:sp>
+      <p:sp>
+        <p:nvSpPr>
+          <p:cNvPr id="11" name="Shape 8"/>
+          <p:cNvSpPr/>
+          <p:nvPr/>
+        </p:nvSpPr>
+        <p:spPr>
+          <a:xfrm>
+            <a:off x="4233672" y="1828800"/>
+            <a:ext cx="3502152" cy="457200"/>
+          </a:xfrm>
+          <a:prstGeom prst="roundRect">
+            <a:avLst>
+              <a:gd name="adj" fmla="val 16000"/>
+            </a:avLst>
+          </a:prstGeom>
+          <a:solidFill>
+            <a:srgbClr val="E8654D"/>
+          </a:solidFill>
+          <a:ln/>
+        </p:spPr>
+      </p:sp>
+      <p:sp>
+        <p:nvSpPr>
+          <p:cNvPr id="12" name="Text 9"/>
+          <p:cNvSpPr txBox="1"/>
+          <p:nvPr/>
+        </p:nvSpPr>
+        <p:spPr>
+          <a:xfrm>
+            <a:off x="4233672" y="1828800"/>
+            <a:ext cx="3502152" cy="457200"/>
+          </a:xfrm>
+          <a:prstGeom prst="rect">
+            <a:avLst/>
+          </a:prstGeom>
+          <a:noFill/>
+          <a:ln/>
+        </p:spPr>
+        <p:txBody>
+          <a:bodyPr wrap="square" lIns="0" tIns="0" rIns="0" bIns="0" rtlCol="0" anchor="ctr"/>
+          <a:lstStyle/>
+          <a:p>
+            <a:pPr algn="ctr" indent="0" marL="0">
+              <a:buNone/>
+            </a:pPr>
+            <a:r>
+              <a:rPr lang="en-US" sz="1250" b="1" dirty="0">
+                <a:solidFill>
+                  <a:srgbClr val="FFFFFF"/>
+                </a:solidFill>
+                <a:latin typeface="Calibri" pitchFamily="34" charset="0"/>
+                <a:ea typeface="Calibri" pitchFamily="34" charset="-122"/>
+                <a:cs typeface="Calibri" pitchFamily="34" charset="-120"/>
+              </a:rPr>
+              <a:t>Family Plus — $3.99/mo</a:t>
+            </a:r>
+            <a:endParaRPr lang="en-US" sz="1250" dirty="0"/>
+          </a:p>
+        </p:txBody>
+      </p:sp>
+      <p:sp>
+        <p:nvSpPr>
+          <p:cNvPr id="13" name="Shape 10"/>
+          <p:cNvSpPr/>
+          <p:nvPr/>
+        </p:nvSpPr>
+        <p:spPr>
+          <a:xfrm>
+            <a:off x="4233672" y="2450592"/>
+            <a:ext cx="3502152" cy="1188720"/>
+          </a:xfrm>
+          <a:prstGeom prst="roundRect">
+            <a:avLst>
+              <a:gd name="adj" fmla="val 6154"/>
+            </a:avLst>
+          </a:prstGeom>
+          <a:solidFill>
+            <a:srgbClr val="F7F7F9"/>
+          </a:solidFill>
+          <a:ln w="12700">
+            <a:solidFill>
+              <a:srgbClr val="E4E4EA"/>
+            </a:solidFill>
+            <a:prstDash val="solid"/>
+          </a:ln>
+        </p:spPr>
+      </p:sp>
+      <p:sp>
+        <p:nvSpPr>
+          <p:cNvPr id="14" name="Text 11"/>
+          <p:cNvSpPr txBox="1"/>
+          <p:nvPr/>
+        </p:nvSpPr>
+        <p:spPr>
+          <a:xfrm>
+            <a:off x="4398264" y="2560320"/>
+            <a:ext cx="3172968" cy="365760"/>
+          </a:xfrm>
+          <a:prstGeom prst="rect">
+            <a:avLst/>
+          </a:prstGeom>
+          <a:noFill/>
+          <a:ln/>
+        </p:spPr>
+        <p:txBody>
+          <a:bodyPr wrap="square" lIns="0" tIns="0" rIns="0" bIns="0" rtlCol="0" anchor="ctr"/>
+          <a:lstStyle/>
+          <a:p>
+            <a:pPr indent="0" marL="0">
+              <a:buNone/>
+            </a:pPr>
+            <a:r>
+              <a:rPr lang="en-US" sz="1250" b="1" dirty="0">
+                <a:solidFill>
+                  <a:srgbClr val="1E2A4A"/>
+                </a:solidFill>
+                <a:latin typeface="Calibri" pitchFamily="34" charset="0"/>
+                <a:ea typeface="Calibri" pitchFamily="34" charset="-122"/>
+                <a:cs typeface="Calibri" pitchFamily="34" charset="-120"/>
+              </a:rPr>
+              <a:t>More photo storage</a:t>
+            </a:r>
+            <a:endParaRPr lang="en-US" sz="1250" dirty="0"/>
+          </a:p>
+        </p:txBody>
+      </p:sp>
+      <p:sp>
+        <p:nvSpPr>
+          <p:cNvPr id="15" name="Text 12"/>
+          <p:cNvSpPr txBox="1"/>
+          <p:nvPr/>
+        </p:nvSpPr>
+        <p:spPr>
+          <a:xfrm>
+            <a:off x="4398264" y="2907792"/>
+            <a:ext cx="3172968" cy="685800"/>
+          </a:xfrm>
+          <a:prstGeom prst="rect">
+            <a:avLst/>
+          </a:prstGeom>
+          <a:noFill/>
+          <a:ln/>
+        </p:spPr>
+        <p:txBody>
+          <a:bodyPr wrap="square" lIns="0" tIns="0" rIns="0" bIns="0" rtlCol="0" anchor="ctr"/>
+          <a:lstStyle/>
+          <a:p>
+            <a:pPr indent="0" marL="0">
+              <a:buNone/>
+            </a:pPr>
+            <a:r>
+              <a:rPr lang="en-US" sz="1050" dirty="0">
+                <a:solidFill>
+                  <a:srgbClr val="5B6478"/>
+                </a:solidFill>
+                <a:latin typeface="Calibri" pitchFamily="34" charset="0"/>
+                <a:ea typeface="Calibri" pitchFamily="34" charset="-122"/>
+                <a:cs typeface="Calibri" pitchFamily="34" charset="-120"/>
+              </a:rPr>
+              <a:t>Beyond the free per-member cap already built this session, backed by Firebase Storage.</a:t>
+            </a:r>
+            <a:endParaRPr lang="en-US" sz="1050" dirty="0"/>
+          </a:p>
+        </p:txBody>
+      </p:sp>
+      <p:sp>
+        <p:nvSpPr>
+          <p:cNvPr id="16" name="Shape 13"/>
+          <p:cNvSpPr/>
+          <p:nvPr/>
+        </p:nvSpPr>
+        <p:spPr>
+          <a:xfrm>
+            <a:off x="4233672" y="3776472"/>
+            <a:ext cx="3502152" cy="1417320"/>
+          </a:xfrm>
+          <a:prstGeom prst="roundRect">
+            <a:avLst>
+              <a:gd name="adj" fmla="val 5161"/>
+            </a:avLst>
+          </a:prstGeom>
+          <a:solidFill>
+            <a:srgbClr val="F7F7F9"/>
+          </a:solidFill>
+          <a:ln w="12700">
+            <a:solidFill>
+              <a:srgbClr val="E4E4EA"/>
+            </a:solidFill>
+            <a:prstDash val="solid"/>
+          </a:ln>
+        </p:spPr>
+      </p:sp>
+      <p:sp>
+        <p:nvSpPr>
+          <p:cNvPr id="17" name="Text 14"/>
+          <p:cNvSpPr txBox="1"/>
+          <p:nvPr/>
+        </p:nvSpPr>
+        <p:spPr>
+          <a:xfrm>
+            <a:off x="4398264" y="3886200"/>
+            <a:ext cx="3172968" cy="365760"/>
+          </a:xfrm>
+          <a:prstGeom prst="rect">
+            <a:avLst/>
+          </a:prstGeom>
+          <a:noFill/>
+          <a:ln/>
+        </p:spPr>
+        <p:txBody>
+          <a:bodyPr wrap="square" lIns="0" tIns="0" rIns="0" bIns="0" rtlCol="0" anchor="ctr"/>
+          <a:lstStyle/>
+          <a:p>
+            <a:pPr indent="0" marL="0">
+              <a:buNone/>
+            </a:pPr>
+            <a:r>
+              <a:rPr lang="en-US" sz="1250" b="1" dirty="0">
+                <a:solidFill>
+                  <a:srgbClr val="1E2A4A"/>
+                </a:solidFill>
+                <a:latin typeface="Calibri" pitchFamily="34" charset="0"/>
+                <a:ea typeface="Calibri" pitchFamily="34" charset="-122"/>
+                <a:cs typeface="Calibri" pitchFamily="34" charset="-120"/>
+              </a:rPr>
+              <a:t>Recurring events + calendar sync</a:t>
+            </a:r>
+            <a:endParaRPr lang="en-US" sz="1250" dirty="0"/>
+          </a:p>
+        </p:txBody>
+      </p:sp>
+      <p:sp>
+        <p:nvSpPr>
+          <p:cNvPr id="18" name="Text 15"/>
+          <p:cNvSpPr txBox="1"/>
+          <p:nvPr/>
+        </p:nvSpPr>
+        <p:spPr>
+          <a:xfrm>
+            <a:off x="4398264" y="4233672"/>
+            <a:ext cx="3172968" cy="914400"/>
+          </a:xfrm>
+          <a:prstGeom prst="rect">
+            <a:avLst/>
+          </a:prstGeom>
+          <a:noFill/>
+          <a:ln/>
+        </p:spPr>
+        <p:txBody>
+          <a:bodyPr wrap="square" lIns="0" tIns="0" rIns="0" bIns="0" rtlCol="0" anchor="ctr"/>
+          <a:lstStyle/>
+          <a:p>
+            <a:pPr indent="0" marL="0">
+              <a:buNone/>
+            </a:pPr>
+            <a:r>
+              <a:rPr lang="en-US" sz="1050" dirty="0">
+                <a:solidFill>
+                  <a:srgbClr val="5B6478"/>
+                </a:solidFill>
+                <a:latin typeface="Calibri" pitchFamily="34" charset="0"/>
+                <a:ea typeface="Calibri" pitchFamily="34" charset="-122"/>
+                <a:cs typeface="Calibri" pitchFamily="34" charset="-120"/>
+              </a:rPr>
+              <a:t>Repeating events and reminders (next on the roadmap) plus Google/Outlook export — exactly what Cozi Gold and FamilyWall Premium charge for today.</a:t>
+            </a:r>
+            <a:endParaRPr lang="en-US" sz="1050" dirty="0"/>
+          </a:p>
+        </p:txBody>
+      </p:sp>
+      <p:sp>
+        <p:nvSpPr>
+          <p:cNvPr id="19" name="Shape 16"/>
+          <p:cNvSpPr/>
+          <p:nvPr/>
+        </p:nvSpPr>
+        <p:spPr>
+          <a:xfrm>
+            <a:off x="7918704" y="1828800"/>
+            <a:ext cx="3502152" cy="457200"/>
+          </a:xfrm>
+          <a:prstGeom prst="roundRect">
+            <a:avLst>
+              <a:gd name="adj" fmla="val 16000"/>
+            </a:avLst>
+          </a:prstGeom>
+          <a:solidFill>
+            <a:srgbClr val="1E2A4A"/>
+          </a:solidFill>
+          <a:ln/>
+        </p:spPr>
+      </p:sp>
+      <p:sp>
+        <p:nvSpPr>
+          <p:cNvPr id="20" name="Text 17"/>
+          <p:cNvSpPr txBox="1"/>
+          <p:nvPr/>
+        </p:nvSpPr>
+        <p:spPr>
+          <a:xfrm>
+            <a:off x="7918704" y="1828800"/>
+            <a:ext cx="3502152" cy="457200"/>
+          </a:xfrm>
+          <a:prstGeom prst="rect">
+            <a:avLst/>
+          </a:prstGeom>
+          <a:noFill/>
+          <a:ln/>
+        </p:spPr>
+        <p:txBody>
+          <a:bodyPr wrap="square" lIns="0" tIns="0" rIns="0" bIns="0" rtlCol="0" anchor="ctr"/>
+          <a:lstStyle/>
+          <a:p>
+            <a:pPr algn="ctr" indent="0" marL="0">
+              <a:buNone/>
+            </a:pPr>
+            <a:r>
+              <a:rPr lang="en-US" sz="1250" b="1" dirty="0">
+                <a:solidFill>
+                  <a:srgbClr val="FFFFFF"/>
+                </a:solidFill>
+                <a:latin typeface="Calibri" pitchFamily="34" charset="0"/>
+                <a:ea typeface="Calibri" pitchFamily="34" charset="-122"/>
+                <a:cs typeface="Calibri" pitchFamily="34" charset="-120"/>
+              </a:rPr>
+              <a:t>School &amp; Group Licensing</a:t>
+            </a:r>
+            <a:endParaRPr lang="en-US" sz="1250" dirty="0"/>
+          </a:p>
+        </p:txBody>
+      </p:sp>
+      <p:sp>
+        <p:nvSpPr>
+          <p:cNvPr id="21" name="Shape 18"/>
+          <p:cNvSpPr/>
+          <p:nvPr/>
+        </p:nvSpPr>
+        <p:spPr>
+          <a:xfrm>
+            <a:off x="7918704" y="2450592"/>
+            <a:ext cx="3502152" cy="1417320"/>
+          </a:xfrm>
+          <a:prstGeom prst="roundRect">
+            <a:avLst>
+              <a:gd name="adj" fmla="val 5161"/>
+            </a:avLst>
+          </a:prstGeom>
+          <a:solidFill>
+            <a:srgbClr val="F7F7F9"/>
+          </a:solidFill>
+          <a:ln w="12700">
+            <a:solidFill>
+              <a:srgbClr val="E4E4EA"/>
+            </a:solidFill>
+            <a:prstDash val="solid"/>
+          </a:ln>
+        </p:spPr>
+      </p:sp>
+      <p:sp>
+        <p:nvSpPr>
+          <p:cNvPr id="22" name="Text 19"/>
+          <p:cNvSpPr txBox="1"/>
+          <p:nvPr/>
+        </p:nvSpPr>
+        <p:spPr>
+          <a:xfrm>
+            <a:off x="8083296" y="2560320"/>
+            <a:ext cx="3172968" cy="365760"/>
+          </a:xfrm>
+          <a:prstGeom prst="rect">
+            <a:avLst/>
+          </a:prstGeom>
+          <a:noFill/>
+          <a:ln/>
+        </p:spPr>
+        <p:txBody>
+          <a:bodyPr wrap="square" lIns="0" tIns="0" rIns="0" bIns="0" rtlCol="0" anchor="ctr"/>
+          <a:lstStyle/>
+          <a:p>
+            <a:pPr indent="0" marL="0">
+              <a:buNone/>
+            </a:pPr>
+            <a:r>
+              <a:rPr lang="en-US" sz="1250" b="1" dirty="0">
+                <a:solidFill>
+                  <a:srgbClr val="1E2A4A"/>
+                </a:solidFill>
+                <a:latin typeface="Calibri" pitchFamily="34" charset="0"/>
+                <a:ea typeface="Calibri" pitchFamily="34" charset="-122"/>
+                <a:cs typeface="Calibri" pitchFamily="34" charset="-120"/>
+              </a:rPr>
+              <a:t>Bulk licensing for organizations</a:t>
+            </a:r>
+            <a:endParaRPr lang="en-US" sz="1250" dirty="0"/>
+          </a:p>
+        </p:txBody>
+      </p:sp>
+      <p:sp>
+        <p:nvSpPr>
+          <p:cNvPr id="23" name="Text 20"/>
+          <p:cNvSpPr txBox="1"/>
+          <p:nvPr/>
+        </p:nvSpPr>
+        <p:spPr>
+          <a:xfrm>
+            <a:off x="8083296" y="2907792"/>
+            <a:ext cx="3172968" cy="914400"/>
+          </a:xfrm>
+          <a:prstGeom prst="rect">
+            <a:avLst/>
+          </a:prstGeom>
+          <a:noFill/>
+          <a:ln/>
+        </p:spPr>
+        <p:txBody>
+          <a:bodyPr wrap="square" lIns="0" tIns="0" rIns="0" bIns="0" rtlCol="0" anchor="ctr"/>
+          <a:lstStyle/>
+          <a:p>
+            <a:pPr indent="0" marL="0">
+              <a:buNone/>
+            </a:pPr>
+            <a:r>
+              <a:rPr lang="en-US" sz="1050" dirty="0">
+                <a:solidFill>
+                  <a:srgbClr val="5B6478"/>
+                </a:solidFill>
+                <a:latin typeface="Calibri" pitchFamily="34" charset="0"/>
+                <a:ea typeface="Calibri" pitchFamily="34" charset="-122"/>
+                <a:cs typeface="Calibri" pitchFamily="34" charset="-120"/>
+              </a:rPr>
+              <a:t>Sports clubs, classrooms, and after-school programs pay one flat fee to coordinate many families at once — a second revenue line neither Cozi nor FamilyWall targets.</a:t>
+            </a:r>
+            <a:endParaRPr lang="en-US" sz="1050" dirty="0"/>
+          </a:p>
+        </p:txBody>
+      </p:sp>
+      <p:sp>
+        <p:nvSpPr>
+          <p:cNvPr id="24" name="Text 21"/>
+          <p:cNvSpPr txBox="1"/>
+          <p:nvPr/>
+        </p:nvSpPr>
+        <p:spPr>
+          <a:xfrm>
+            <a:off x="548640" y="5623560"/>
+            <a:ext cx="10881360" cy="640080"/>
+          </a:xfrm>
+          <a:prstGeom prst="rect">
+            <a:avLst/>
+          </a:prstGeom>
+          <a:noFill/>
+          <a:ln/>
+        </p:spPr>
+        <p:txBody>
+          <a:bodyPr wrap="square" lIns="0" tIns="0" rIns="0" bIns="0" rtlCol="0" anchor="ctr"/>
+          <a:lstStyle/>
+          <a:p>
+            <a:pPr indent="0" marL="0">
+              <a:buNone/>
+            </a:pPr>
+            <a:r>
+              <a:rPr lang="en-US" sz="1250" i="1" dirty="0">
+                <a:solidFill>
+                  <a:srgbClr val="E8654D"/>
+                </a:solidFill>
+                <a:latin typeface="Calibri" pitchFamily="34" charset="0"/>
+                <a:ea typeface="Calibri" pitchFamily="34" charset="-122"/>
+                <a:cs typeface="Calibri" pitchFamily="34" charset="-120"/>
+              </a:rPr>
+              <a:t>Illustrative only: Cozi (Gold $39/yr, Max $79/yr) and FamilyWall ($44.99/yr) both run this same whole-family-not-per-seat model. At a modest 5% free-to-paid conversion, 10,000 free installs ≈ $19,500/year — before any school or club licensing.</a:t>
+            </a:r>
+            <a:endParaRPr lang="en-US" sz="1250" dirty="0"/>
+          </a:p>
+        </p:txBody>
+      </p:sp>
+      <p:sp>
+        <p:nvSpPr>
+          <p:cNvPr id="25" name="Text 22"/>
+          <p:cNvSpPr txBox="1"/>
+          <p:nvPr/>
+        </p:nvSpPr>
+        <p:spPr>
+          <a:xfrm>
+            <a:off x="548640" y="6446520"/>
+            <a:ext cx="2743200" cy="274320"/>
+          </a:xfrm>
+          <a:prstGeom prst="rect">
+            <a:avLst/>
+          </a:prstGeom>
+          <a:noFill/>
+          <a:ln/>
+        </p:spPr>
+        <p:txBody>
+          <a:bodyPr wrap="square" lIns="0" tIns="0" rIns="0" bIns="0" rtlCol="0" anchor="ctr"/>
+          <a:lstStyle/>
+          <a:p>
+            <a:pPr indent="0" marL="0">
+              <a:buNone/>
+            </a:pPr>
+            <a:r>
+              <a:rPr lang="en-US" sz="1000" dirty="0">
+                <a:solidFill>
+                  <a:srgbClr val="A8ADB8"/>
+                </a:solidFill>
+                <a:latin typeface="Calibri" pitchFamily="34" charset="0"/>
+                <a:ea typeface="Calibri" pitchFamily="34" charset="-122"/>
+                <a:cs typeface="Calibri" pitchFamily="34" charset="-120"/>
+              </a:rPr>
+              <a:t>FamilyPulse</a:t>
+            </a:r>
+            <a:endParaRPr lang="en-US" sz="1000" dirty="0"/>
+          </a:p>
+        </p:txBody>
+      </p:sp>
+      <p:sp>
+        <p:nvSpPr>
+          <p:cNvPr id="26" name="Text 23"/>
+          <p:cNvSpPr txBox="1"/>
+          <p:nvPr/>
+        </p:nvSpPr>
+        <p:spPr>
+          <a:xfrm>
+            <a:off x="11548872" y="6446520"/>
+            <a:ext cx="457200" cy="274320"/>
+          </a:xfrm>
+          <a:prstGeom prst="rect">
+            <a:avLst/>
+          </a:prstGeom>
+          <a:noFill/>
+          <a:ln/>
+        </p:spPr>
+        <p:txBody>
+          <a:bodyPr wrap="square" lIns="0" tIns="0" rIns="0" bIns="0" rtlCol="0" anchor="ctr"/>
+          <a:lstStyle/>
+          <a:p>
+            <a:pPr algn="r" indent="0" marL="0">
+              <a:buNone/>
+            </a:pPr>
+            <a:r>
+              <a:rPr lang="en-US" sz="1000" dirty="0">
+                <a:solidFill>
+                  <a:srgbClr val="A8ADB8"/>
+                </a:solidFill>
+                <a:latin typeface="Calibri" pitchFamily="34" charset="0"/>
+                <a:ea typeface="Calibri" pitchFamily="34" charset="-122"/>
+                <a:cs typeface="Calibri" pitchFamily="34" charset="-120"/>
+              </a:rPr>
+              <a:t>17</a:t>
+            </a:r>
+            <a:endParaRPr lang="en-US" sz="1000" dirty="0"/>
+          </a:p>
+        </p:txBody>
+      </p:sp>
+    </p:spTree>
+  </p:cSld>
+  <p:clrMapOvr>
+    <a:masterClrMapping/>
+  </p:clrMapOvr>
+</p:sld>
+</file>
+
+<file path=ppt/slides/slide18.xml><?xml version="1.0" encoding="utf-8"?>
+<p:sld xmlns:a="http://schemas.openxmlformats.org/drawingml/2006/main" xmlns:r="http://schemas.openxmlformats.org/officeDocument/2006/relationships" xmlns:p="http://schemas.openxmlformats.org/presentationml/2006/main">
+  <p:cSld name="Slide 18">
+    <p:spTree>
+      <p:nvGrpSpPr>
+        <p:cNvPr id="1" name=""/>
+        <p:cNvGrpSpPr/>
+        <p:nvPr/>
+      </p:nvGrpSpPr>
+      <p:grpSpPr>
+        <a:xfrm>
+          <a:off x="0" y="0"/>
+          <a:ext cx="0" cy="0"/>
+          <a:chOff x="0" y="0"/>
+          <a:chExt cx="0" cy="0"/>
+        </a:xfrm>
+      </p:grpSpPr>
       <p:pic>
         <p:nvPicPr>
           <p:cNvPr id="2" name="Image 0" descr="/home/claude/family_pulse_docs/deck/icons/heartbeat_1E2A4A.png">    </p:cNvPr>
